--- a/notas_unidades/unidad1/3_estructura_sfm.pptx
+++ b/notas_unidades/unidad1/3_estructura_sfm.pptx
@@ -1418,7 +1418,7 @@
 </p:sldMaster>
 </file>
 
-<file path=ppt/slides/slide19.xml><?xml version="1.0" encoding="utf-8"?>
+<file path=ppt/slides/slide1.xml><?xml version="1.0" encoding="utf-8"?>
 <p:sld xmlns:a="http://schemas.openxmlformats.org/drawingml/2006/main" xmlns:p="http://schemas.openxmlformats.org/presentationml/2006/main" xmlns:r="http://schemas.openxmlformats.org/officeDocument/2006/relationships">
   <p:cSld>
     <p:spTree>
@@ -1545,7 +1545,7 @@
             <a:r>
               <a:rPr lang="en-US" sz="4000" b="1" dirty="0">
                 <a:solidFill>
-                  <a:srgbClr val="FFFFFF"/>
+                  <a:srgbClr val="141B4D"/>
                 </a:solidFill>
                 <a:latin typeface="Cambria" pitchFamily="34" charset="0"/>
                 <a:ea typeface="Cambria" pitchFamily="34" charset="-122"/>
@@ -1643,7 +1643,7 @@
 </p:sld>
 </file>
 
-<file path=ppt/slides/slide20.xml><?xml version="1.0" encoding="utf-8"?>
+<file path=ppt/slides/slide2.xml><?xml version="1.0" encoding="utf-8"?>
 <p:sld xmlns:a="http://schemas.openxmlformats.org/drawingml/2006/main" xmlns:p="http://schemas.openxmlformats.org/presentationml/2006/main" xmlns:r="http://schemas.openxmlformats.org/officeDocument/2006/relationships">
   <p:cSld>
     <p:spTree>
@@ -1945,7 +1945,7 @@
 </p:sld>
 </file>
 
-<file path=ppt/slides/slide21.xml><?xml version="1.0" encoding="utf-8"?>
+<file path=ppt/slides/slide3.xml><?xml version="1.0" encoding="utf-8"?>
 <p:sld xmlns:a="http://schemas.openxmlformats.org/drawingml/2006/main" xmlns:p="http://schemas.openxmlformats.org/presentationml/2006/main" xmlns:r="http://schemas.openxmlformats.org/officeDocument/2006/relationships">
   <p:cSld>
     <p:spTree>
@@ -2314,7 +2314,7 @@
 </p:sld>
 </file>
 
-<file path=ppt/slides/slide22.xml><?xml version="1.0" encoding="utf-8"?>
+<file path=ppt/slides/slide4.xml><?xml version="1.0" encoding="utf-8"?>
 <p:sld xmlns:a="http://schemas.openxmlformats.org/drawingml/2006/main" xmlns:p="http://schemas.openxmlformats.org/presentationml/2006/main" xmlns:r="http://schemas.openxmlformats.org/officeDocument/2006/relationships">
   <p:cSld>
     <p:spTree>
@@ -3650,7 +3650,7 @@
 </p:sld>
 </file>
 
-<file path=ppt/slides/slide23.xml><?xml version="1.0" encoding="utf-8"?>
+<file path=ppt/slides/slide5.xml><?xml version="1.0" encoding="utf-8"?>
 <p:sld xmlns:a="http://schemas.openxmlformats.org/drawingml/2006/main" xmlns:p="http://schemas.openxmlformats.org/presentationml/2006/main" xmlns:r="http://schemas.openxmlformats.org/officeDocument/2006/relationships">
   <p:cSld>
     <p:spTree>
@@ -6492,7 +6492,7 @@
 </p:sld>
 </file>
 
-<file path=ppt/slides/slide24.xml><?xml version="1.0" encoding="utf-8"?>
+<file path=ppt/slides/slide6.xml><?xml version="1.0" encoding="utf-8"?>
 <p:sld xmlns:a="http://schemas.openxmlformats.org/drawingml/2006/main" xmlns:p="http://schemas.openxmlformats.org/presentationml/2006/main" xmlns:r="http://schemas.openxmlformats.org/officeDocument/2006/relationships">
   <p:cSld>
     <p:spTree>
@@ -6895,7 +6895,7 @@
 </p:sld>
 </file>
 
-<file path=ppt/slides/slide25.xml><?xml version="1.0" encoding="utf-8"?>
+<file path=ppt/slides/slide7.xml><?xml version="1.0" encoding="utf-8"?>
 <p:sld xmlns:a="http://schemas.openxmlformats.org/drawingml/2006/main" xmlns:p="http://schemas.openxmlformats.org/presentationml/2006/main" xmlns:r="http://schemas.openxmlformats.org/officeDocument/2006/relationships">
   <p:cSld>
     <p:spTree>
